--- a/apps/resources/bundled_files/1-klass-10-ichinde-kemituu-sabak.pptx
+++ b/apps/resources/bundled_files/1-klass-10-ichinde-kemituu-sabak.pptx
@@ -5196,7 +5196,7 @@
                 </a:solidFill>
                 <a:latin typeface="PT Sans"/>
               </a:rPr>
-              <a:t>1-класс · Математика</a:t>
+              <a:t/>
             </a:r>
           </a:p>
         </p:txBody>
@@ -5688,7 +5688,7 @@
                 </a:solidFill>
                 <a:latin typeface="PT Sans"/>
               </a:rPr>
-              <a:t>1-класс ›</a:t>
+              <a:t/>
             </a:r>
           </a:p>
           <a:p>
@@ -6637,7 +6637,7 @@
                 </a:solidFill>
                 <a:latin typeface="PT Sans"/>
               </a:rPr>
-              <a:t>1-класс ›</a:t>
+              <a:t/>
             </a:r>
           </a:p>
           <a:p>
@@ -10252,7 +10252,7 @@
                 </a:solidFill>
                 <a:latin typeface="PT Sans"/>
               </a:rPr>
-              <a:t>1-класс ›</a:t>
+              <a:t/>
             </a:r>
           </a:p>
           <a:p>
@@ -12481,7 +12481,7 @@
                 </a:solidFill>
                 <a:latin typeface="PT Sans"/>
               </a:rPr>
-              <a:t>1-класс ›</a:t>
+              <a:t/>
             </a:r>
           </a:p>
           <a:p>
@@ -13811,7 +13811,7 @@
                 </a:solidFill>
                 <a:latin typeface="PT Sans"/>
               </a:rPr>
-              <a:t>1-класс ›</a:t>
+              <a:t/>
             </a:r>
           </a:p>
           <a:p>
@@ -14523,7 +14523,7 @@
                 </a:solidFill>
                 <a:latin typeface="PT Sans"/>
               </a:rPr>
-              <a:t>1-класс ›</a:t>
+              <a:t/>
             </a:r>
           </a:p>
           <a:p>
@@ -15235,7 +15235,7 @@
                 </a:solidFill>
                 <a:latin typeface="PT Sans"/>
               </a:rPr>
-              <a:t>1-класс ›</a:t>
+              <a:t/>
             </a:r>
           </a:p>
           <a:p>
@@ -16784,7 +16784,7 @@
                 </a:solidFill>
                 <a:latin typeface="PT Sans"/>
               </a:rPr>
-              <a:t>1-класс ›</a:t>
+              <a:t/>
             </a:r>
           </a:p>
           <a:p>
@@ -17868,7 +17868,7 @@
                 </a:solidFill>
                 <a:latin typeface="PT Sans"/>
               </a:rPr>
-              <a:t>1-класс ›</a:t>
+              <a:t/>
             </a:r>
           </a:p>
           <a:p>
@@ -19398,7 +19398,7 @@
                 </a:solidFill>
                 <a:latin typeface="PT Sans"/>
               </a:rPr>
-              <a:t>1-класс ›</a:t>
+              <a:t/>
             </a:r>
           </a:p>
           <a:p>
@@ -21269,7 +21269,7 @@
                 </a:solidFill>
                 <a:latin typeface="PT Sans"/>
               </a:rPr>
-              <a:t>1-класс ›</a:t>
+              <a:t/>
             </a:r>
           </a:p>
           <a:p>
@@ -22546,7 +22546,7 @@
                 </a:solidFill>
                 <a:latin typeface="PT Sans"/>
               </a:rPr>
-              <a:t>1-класс ›</a:t>
+              <a:t/>
             </a:r>
           </a:p>
           <a:p>
@@ -23974,7 +23974,7 @@
                 </a:solidFill>
                 <a:latin typeface="PT Sans"/>
               </a:rPr>
-              <a:t>1-класс ›</a:t>
+              <a:t/>
             </a:r>
           </a:p>
           <a:p>
@@ -25430,7 +25430,7 @@
                 </a:solidFill>
                 <a:latin typeface="PT Sans"/>
               </a:rPr>
-              <a:t>1-класс ›</a:t>
+              <a:t/>
             </a:r>
           </a:p>
           <a:p>
@@ -26422,7 +26422,7 @@
                 </a:solidFill>
                 <a:latin typeface="PT Sans"/>
               </a:rPr>
-              <a:t>1-класс ›</a:t>
+              <a:t/>
             </a:r>
           </a:p>
           <a:p>
@@ -27222,7 +27222,7 @@
                 </a:solidFill>
                 <a:latin typeface="PT Sans"/>
               </a:rPr>
-              <a:t>1-класс ›</a:t>
+              <a:t/>
             </a:r>
           </a:p>
           <a:p>
@@ -28063,7 +28063,7 @@
                 </a:solidFill>
                 <a:latin typeface="PT Sans"/>
               </a:rPr>
-              <a:t>1-класс ›</a:t>
+              <a:t/>
             </a:r>
           </a:p>
           <a:p>
@@ -29012,7 +29012,7 @@
                 </a:solidFill>
                 <a:latin typeface="PT Sans"/>
               </a:rPr>
-              <a:t>1-класс ›</a:t>
+              <a:t/>
             </a:r>
           </a:p>
           <a:p>
@@ -30466,7 +30466,7 @@
                 </a:solidFill>
                 <a:latin typeface="PT Sans"/>
               </a:rPr>
-              <a:t>1-класс ›</a:t>
+              <a:t/>
             </a:r>
           </a:p>
           <a:p>
@@ -31212,7 +31212,7 @@
                 </a:solidFill>
                 <a:latin typeface="PT Sans"/>
               </a:rPr>
-              <a:t>1-класс ›</a:t>
+              <a:t/>
             </a:r>
           </a:p>
           <a:p>
@@ -32020,7 +32020,7 @@
                 </a:solidFill>
                 <a:latin typeface="PT Sans"/>
               </a:rPr>
-              <a:t>1-класс ›</a:t>
+              <a:t/>
             </a:r>
           </a:p>
           <a:p>
@@ -33211,7 +33211,7 @@
                 </a:solidFill>
                 <a:latin typeface="PT Sans"/>
               </a:rPr>
-              <a:t>1-класс ›</a:t>
+              <a:t/>
             </a:r>
           </a:p>
           <a:p>
@@ -34406,7 +34406,7 @@
                 </a:solidFill>
                 <a:latin typeface="PT Sans"/>
               </a:rPr>
-              <a:t>1-класс ›</a:t>
+              <a:t/>
             </a:r>
           </a:p>
           <a:p>
@@ -34587,7 +34587,7 @@
                 </a:solidFill>
                 <a:latin typeface="PT Sans"/>
               </a:rPr>
-              <a:t>1-класс</a:t>
+              <a:t/>
             </a:r>
           </a:p>
         </p:txBody>
@@ -34767,7 +34767,7 @@
                 </a:solidFill>
                 <a:latin typeface="PT Sans"/>
               </a:rPr>
-              <a:t>1-класс</a:t>
+              <a:t/>
             </a:r>
           </a:p>
         </p:txBody>
@@ -35003,7 +35003,7 @@
                 </a:solidFill>
                 <a:latin typeface="PT Sans"/>
               </a:rPr>
-              <a:t>1-класс</a:t>
+              <a:t/>
             </a:r>
           </a:p>
         </p:txBody>
@@ -35184,7 +35184,7 @@
                 </a:solidFill>
                 <a:latin typeface="PT Sans"/>
               </a:rPr>
-              <a:t>2-класс</a:t>
+              <a:t/>
             </a:r>
           </a:p>
         </p:txBody>
@@ -35585,7 +35585,7 @@
                 </a:solidFill>
                 <a:latin typeface="PT Sans"/>
               </a:rPr>
-              <a:t>1-класс ›</a:t>
+              <a:t/>
             </a:r>
           </a:p>
           <a:p>
@@ -36733,7 +36733,7 @@
                 </a:solidFill>
                 <a:latin typeface="PT Sans"/>
               </a:rPr>
-              <a:t>1-класс ›</a:t>
+              <a:t/>
             </a:r>
           </a:p>
           <a:p>

--- a/apps/resources/bundled_files/1-klass-10-ichinde-kemituu-sabak.pptx
+++ b/apps/resources/bundled_files/1-klass-10-ichinde-kemituu-sabak.pptx
@@ -1582,7 +1582,7 @@
           <a:lstStyle/>
           <a:p>
             <a:r>
-              <a:t>Ой жүгүртүү маданияты (Wenxi Lee, 2.6).</a:t>
+              <a:t>Ой жүгүртүү маданияты (Wenxi Lee, 2,6).</a:t>
             </a:r>
           </a:p>
         </p:txBody>
